--- a/prezentare conspect/prezentari/05 Gestionarea Views (Presentation).pptx
+++ b/prezentare conspect/prezentari/05 Gestionarea Views (Presentation).pptx
@@ -218,7 +218,7 @@
           <a:p>
             <a:fld id="{AA7584C8-262A-494E-B760-46BF8AC8A01F}" type="datetimeFigureOut">
               <a:rPr lang="en-US" smtClean="0"/>
-              <a:t>3/27/2025</a:t>
+              <a:t>5/17/2025</a:t>
             </a:fld>
             <a:endParaRPr lang="en-US" dirty="0"/>
           </a:p>
@@ -664,7 +664,7 @@
           <a:p>
             <a:fld id="{B4C71EC6-210F-42DE-9C53-41977AD35B3D}" type="datetimeFigureOut">
               <a:rPr lang="ru-RU" smtClean="0"/>
-              <a:t>27.03.2025</a:t>
+              <a:t>17.05.2025</a:t>
             </a:fld>
             <a:endParaRPr lang="ru-RU" dirty="0"/>
           </a:p>
@@ -827,7 +827,7 @@
           <a:p>
             <a:fld id="{B4C71EC6-210F-42DE-9C53-41977AD35B3D}" type="datetimeFigureOut">
               <a:rPr lang="ru-RU" smtClean="0"/>
-              <a:t>27.03.2025</a:t>
+              <a:t>17.05.2025</a:t>
             </a:fld>
             <a:endParaRPr lang="ru-RU" dirty="0"/>
           </a:p>
@@ -1000,7 +1000,7 @@
           <a:p>
             <a:fld id="{B4C71EC6-210F-42DE-9C53-41977AD35B3D}" type="datetimeFigureOut">
               <a:rPr lang="ru-RU" smtClean="0"/>
-              <a:t>27.03.2025</a:t>
+              <a:t>17.05.2025</a:t>
             </a:fld>
             <a:endParaRPr lang="ru-RU" dirty="0"/>
           </a:p>
@@ -1163,7 +1163,7 @@
           <a:p>
             <a:fld id="{B4C71EC6-210F-42DE-9C53-41977AD35B3D}" type="datetimeFigureOut">
               <a:rPr lang="ru-RU" smtClean="0"/>
-              <a:t>27.03.2025</a:t>
+              <a:t>17.05.2025</a:t>
             </a:fld>
             <a:endParaRPr lang="ru-RU" dirty="0"/>
           </a:p>
@@ -1403,7 +1403,7 @@
           <a:p>
             <a:fld id="{B4C71EC6-210F-42DE-9C53-41977AD35B3D}" type="datetimeFigureOut">
               <a:rPr lang="ru-RU" smtClean="0"/>
-              <a:t>27.03.2025</a:t>
+              <a:t>17.05.2025</a:t>
             </a:fld>
             <a:endParaRPr lang="ru-RU" dirty="0"/>
           </a:p>
@@ -1683,7 +1683,7 @@
           <a:p>
             <a:fld id="{B4C71EC6-210F-42DE-9C53-41977AD35B3D}" type="datetimeFigureOut">
               <a:rPr lang="ru-RU" smtClean="0"/>
-              <a:t>27.03.2025</a:t>
+              <a:t>17.05.2025</a:t>
             </a:fld>
             <a:endParaRPr lang="ru-RU" dirty="0"/>
           </a:p>
@@ -2097,7 +2097,7 @@
           <a:p>
             <a:fld id="{B4C71EC6-210F-42DE-9C53-41977AD35B3D}" type="datetimeFigureOut">
               <a:rPr lang="ru-RU" smtClean="0"/>
-              <a:t>27.03.2025</a:t>
+              <a:t>17.05.2025</a:t>
             </a:fld>
             <a:endParaRPr lang="ru-RU" dirty="0"/>
           </a:p>
@@ -2209,7 +2209,7 @@
           <a:p>
             <a:fld id="{B4C71EC6-210F-42DE-9C53-41977AD35B3D}" type="datetimeFigureOut">
               <a:rPr lang="ru-RU" smtClean="0"/>
-              <a:t>27.03.2025</a:t>
+              <a:t>17.05.2025</a:t>
             </a:fld>
             <a:endParaRPr lang="ru-RU" dirty="0"/>
           </a:p>
@@ -2299,7 +2299,7 @@
           <a:p>
             <a:fld id="{B4C71EC6-210F-42DE-9C53-41977AD35B3D}" type="datetimeFigureOut">
               <a:rPr lang="ru-RU" smtClean="0"/>
-              <a:t>27.03.2025</a:t>
+              <a:t>17.05.2025</a:t>
             </a:fld>
             <a:endParaRPr lang="ru-RU" dirty="0"/>
           </a:p>
@@ -2569,7 +2569,7 @@
           <a:p>
             <a:fld id="{B4C71EC6-210F-42DE-9C53-41977AD35B3D}" type="datetimeFigureOut">
               <a:rPr lang="ru-RU" smtClean="0"/>
-              <a:t>27.03.2025</a:t>
+              <a:t>17.05.2025</a:t>
             </a:fld>
             <a:endParaRPr lang="ru-RU" dirty="0"/>
           </a:p>
@@ -2816,7 +2816,7 @@
           <a:p>
             <a:fld id="{B4C71EC6-210F-42DE-9C53-41977AD35B3D}" type="datetimeFigureOut">
               <a:rPr lang="ru-RU" smtClean="0"/>
-              <a:t>27.03.2025</a:t>
+              <a:t>17.05.2025</a:t>
             </a:fld>
             <a:endParaRPr lang="ru-RU" dirty="0"/>
           </a:p>
@@ -3022,7 +3022,7 @@
           <a:p>
             <a:fld id="{B4C71EC6-210F-42DE-9C53-41977AD35B3D}" type="datetimeFigureOut">
               <a:rPr lang="ru-RU" smtClean="0"/>
-              <a:t>27.03.2025</a:t>
+              <a:t>17.05.2025</a:t>
             </a:fld>
             <a:endParaRPr lang="ru-RU" dirty="0"/>
           </a:p>
@@ -10407,15 +10407,6 @@
 </file>
 
 <file path=customXml/item2.xml><?xml version="1.0" encoding="utf-8"?>
-<?mso-contentType ?>
-<FormTemplates xmlns="http://schemas.microsoft.com/sharepoint/v3/contenttype/forms">
-  <Display>DocumentLibraryForm</Display>
-  <Edit>DocumentLibraryForm</Edit>
-  <New>DocumentLibraryForm</New>
-</FormTemplates>
-</file>
-
-<file path=customXml/item3.xml><?xml version="1.0" encoding="utf-8"?>
 <ct:contentTypeSchema xmlns:ct="http://schemas.microsoft.com/office/2006/metadata/contentType" xmlns:ma="http://schemas.microsoft.com/office/2006/metadata/properties/metaAttributes" ct:_="" ma:_="" ma:contentTypeName="Document" ma:contentTypeID="0x01010096FC40F6EE3DFE45B2AE23292736D481" ma:contentTypeVersion="12" ma:contentTypeDescription="Create a new document." ma:contentTypeScope="" ma:versionID="af5a8336c75263f3c078c0a9b9eb6a42">
   <xsd:schema xmlns:xsd="http://www.w3.org/2001/XMLSchema" xmlns:xs="http://www.w3.org/2001/XMLSchema" xmlns:p="http://schemas.microsoft.com/office/2006/metadata/properties" xmlns:ns2="bd0c033e-a036-4b6e-ba8b-99fdec7a5ddc" xmlns:ns3="49068656-1d9a-4fc1-9ba5-2bfa44456d64" targetNamespace="http://schemas.microsoft.com/office/2006/metadata/properties" ma:root="true" ma:fieldsID="4621262167aac893b1a4cc38e83f3e5c" ns2:_="" ns3:_="">
     <xsd:import namespace="bd0c033e-a036-4b6e-ba8b-99fdec7a5ddc"/>
@@ -10616,6 +10607,15 @@
 </ct:contentTypeSchema>
 </file>
 
+<file path=customXml/item3.xml><?xml version="1.0" encoding="utf-8"?>
+<?mso-contentType ?>
+<FormTemplates xmlns="http://schemas.microsoft.com/sharepoint/v3/contenttype/forms">
+  <Display>DocumentLibraryForm</Display>
+  <Edit>DocumentLibraryForm</Edit>
+  <New>DocumentLibraryForm</New>
+</FormTemplates>
+</file>
+
 <file path=customXml/itemProps1.xml><?xml version="1.0" encoding="utf-8"?>
 <ds:datastoreItem xmlns:ds="http://schemas.openxmlformats.org/officeDocument/2006/customXml" ds:itemID="{AB8D19FB-44F1-44D2-8469-813360613738}">
   <ds:schemaRefs>
@@ -10628,14 +10628,6 @@
 </file>
 
 <file path=customXml/itemProps2.xml><?xml version="1.0" encoding="utf-8"?>
-<ds:datastoreItem xmlns:ds="http://schemas.openxmlformats.org/officeDocument/2006/customXml" ds:itemID="{2554026F-96FE-4B15-A44B-5C98632A6D4B}">
-  <ds:schemaRefs>
-    <ds:schemaRef ds:uri="http://schemas.microsoft.com/sharepoint/v3/contenttype/forms"/>
-  </ds:schemaRefs>
-</ds:datastoreItem>
-</file>
-
-<file path=customXml/itemProps3.xml><?xml version="1.0" encoding="utf-8"?>
 <ds:datastoreItem xmlns:ds="http://schemas.openxmlformats.org/officeDocument/2006/customXml" ds:itemID="{0A4543F4-8528-4ED6-95D8-8E0FB51990ED}">
   <ds:schemaRefs>
     <ds:schemaRef ds:uri="http://schemas.microsoft.com/office/2006/metadata/contentType"/>
@@ -10652,4 +10644,12 @@
     <ds:schemaRef ds:uri="http://schemas.microsoft.com/internal/obd"/>
   </ds:schemaRefs>
 </ds:datastoreItem>
+</file>
+
+<file path=customXml/itemProps3.xml><?xml version="1.0" encoding="utf-8"?>
+<ds:datastoreItem xmlns:ds="http://schemas.openxmlformats.org/officeDocument/2006/customXml" ds:itemID="{2554026F-96FE-4B15-A44B-5C98632A6D4B}">
+  <ds:schemaRefs>
+    <ds:schemaRef ds:uri="http://schemas.microsoft.com/sharepoint/v3/contenttype/forms"/>
+  </ds:schemaRefs>
+</ds:datastoreItem>
 </file>